--- a/ppt/IoTAI02-Challenge&Impact.pptx
+++ b/ppt/IoTAI02-Challenge&Impact.pptx
@@ -5,29 +5,20 @@
     <p:sldMasterId id="2147483653" r:id="rId1"/>
   </p:sldMasterIdLst>
   <p:notesMasterIdLst>
-    <p:notesMasterId r:id="rId19"/>
+    <p:notesMasterId r:id="rId10"/>
   </p:notesMasterIdLst>
   <p:handoutMasterIdLst>
-    <p:handoutMasterId r:id="rId20"/>
+    <p:handoutMasterId r:id="rId11"/>
   </p:handoutMasterIdLst>
   <p:sldIdLst>
     <p:sldId id="264" r:id="rId2"/>
     <p:sldId id="300" r:id="rId3"/>
     <p:sldId id="301" r:id="rId4"/>
-    <p:sldId id="302" r:id="rId5"/>
-    <p:sldId id="303" r:id="rId6"/>
-    <p:sldId id="304" r:id="rId7"/>
-    <p:sldId id="305" r:id="rId8"/>
-    <p:sldId id="306" r:id="rId9"/>
-    <p:sldId id="307" r:id="rId10"/>
-    <p:sldId id="308" r:id="rId11"/>
-    <p:sldId id="309" r:id="rId12"/>
-    <p:sldId id="310" r:id="rId13"/>
-    <p:sldId id="311" r:id="rId14"/>
-    <p:sldId id="312" r:id="rId15"/>
-    <p:sldId id="313" r:id="rId16"/>
-    <p:sldId id="314" r:id="rId17"/>
-    <p:sldId id="315" r:id="rId18"/>
+    <p:sldId id="304" r:id="rId5"/>
+    <p:sldId id="306" r:id="rId6"/>
+    <p:sldId id="307" r:id="rId7"/>
+    <p:sldId id="308" r:id="rId8"/>
+    <p:sldId id="309" r:id="rId9"/>
   </p:sldIdLst>
   <p:sldSz cx="9144000" cy="6858000" type="screen4x3"/>
   <p:notesSz cx="6648450" cy="9782175"/>
@@ -3724,1060 +3715,6 @@
 </p:sld>
 </file>
 
-<file path=ppt/slides/slide10.xml><?xml version="1.0" encoding="utf-8"?>
-<p:sld xmlns:a="http://schemas.openxmlformats.org/drawingml/2006/main" xmlns:r="http://schemas.openxmlformats.org/officeDocument/2006/relationships" xmlns:p="http://schemas.openxmlformats.org/presentationml/2006/main">
-  <p:cSld>
-    <p:spTree>
-      <p:nvGrpSpPr>
-        <p:cNvPr id="1" name=""/>
-        <p:cNvGrpSpPr/>
-        <p:nvPr/>
-      </p:nvGrpSpPr>
-      <p:grpSpPr>
-        <a:xfrm>
-          <a:off x="0" y="0"/>
-          <a:ext cx="0" cy="0"/>
-          <a:chOff x="0" y="0"/>
-          <a:chExt cx="0" cy="0"/>
-        </a:xfrm>
-      </p:grpSpPr>
-      <p:sp>
-        <p:nvSpPr>
-          <p:cNvPr id="2" name="Titre 1">
-            <a:extLst>
-              <a:ext uri="{FF2B5EF4-FFF2-40B4-BE49-F238E27FC236}">
-                <a16:creationId xmlns:a16="http://schemas.microsoft.com/office/drawing/2014/main" id="{46913075-B6D2-2F0D-2D6F-1F0833213CB7}"/>
-              </a:ext>
-            </a:extLst>
-          </p:cNvPr>
-          <p:cNvSpPr>
-            <a:spLocks noGrp="1"/>
-          </p:cNvSpPr>
-          <p:nvPr>
-            <p:ph type="title"/>
-          </p:nvPr>
-        </p:nvSpPr>
-        <p:spPr/>
-        <p:txBody>
-          <a:bodyPr/>
-          <a:lstStyle/>
-          <a:p>
-            <a:r>
-              <a:rPr lang="fr-FR" dirty="0"/>
-              <a:t>IoT embarqué</a:t>
-            </a:r>
-          </a:p>
-        </p:txBody>
-      </p:sp>
-      <p:sp>
-        <p:nvSpPr>
-          <p:cNvPr id="3" name="Espace réservé du contenu 2">
-            <a:extLst>
-              <a:ext uri="{FF2B5EF4-FFF2-40B4-BE49-F238E27FC236}">
-                <a16:creationId xmlns:a16="http://schemas.microsoft.com/office/drawing/2014/main" id="{DABABBDA-B082-63C9-4BE2-08007043541E}"/>
-              </a:ext>
-            </a:extLst>
-          </p:cNvPr>
-          <p:cNvSpPr>
-            <a:spLocks noGrp="1"/>
-          </p:cNvSpPr>
-          <p:nvPr>
-            <p:ph idx="1"/>
-          </p:nvPr>
-        </p:nvSpPr>
-        <p:spPr/>
-        <p:txBody>
-          <a:bodyPr/>
-          <a:lstStyle/>
-          <a:p>
-            <a:r>
-              <a:rPr lang="fr-FR" dirty="0"/>
-              <a:t>Stations météos éloignés</a:t>
-            </a:r>
-          </a:p>
-          <a:p>
-            <a:r>
-              <a:rPr lang="fr-FR" dirty="0"/>
-              <a:t>Nomadisme</a:t>
-            </a:r>
-          </a:p>
-          <a:p>
-            <a:r>
-              <a:rPr lang="fr-FR" dirty="0"/>
-              <a:t>Spatial</a:t>
-            </a:r>
-          </a:p>
-          <a:p>
-            <a:r>
-              <a:rPr lang="fr-FR" dirty="0"/>
-              <a:t>Drone</a:t>
-            </a:r>
-          </a:p>
-        </p:txBody>
-      </p:sp>
-      <p:pic>
-        <p:nvPicPr>
-          <p:cNvPr id="5" name="Image 4">
-            <a:extLst>
-              <a:ext uri="{FF2B5EF4-FFF2-40B4-BE49-F238E27FC236}">
-                <a16:creationId xmlns:a16="http://schemas.microsoft.com/office/drawing/2014/main" id="{FC2B98DC-C2A9-9F70-C188-8B4E8E8FE8A3}"/>
-              </a:ext>
-            </a:extLst>
-          </p:cNvPr>
-          <p:cNvPicPr>
-            <a:picLocks noChangeAspect="1"/>
-          </p:cNvPicPr>
-          <p:nvPr/>
-        </p:nvPicPr>
-        <p:blipFill>
-          <a:blip r:embed="rId2"/>
-          <a:stretch>
-            <a:fillRect/>
-          </a:stretch>
-        </p:blipFill>
-        <p:spPr>
-          <a:xfrm>
-            <a:off x="4211960" y="3066160"/>
-            <a:ext cx="2457793" cy="1733792"/>
-          </a:xfrm>
-          <a:prstGeom prst="rect">
-            <a:avLst/>
-          </a:prstGeom>
-        </p:spPr>
-      </p:pic>
-    </p:spTree>
-    <p:extLst>
-      <p:ext uri="{BB962C8B-B14F-4D97-AF65-F5344CB8AC3E}">
-        <p14:creationId xmlns:p14="http://schemas.microsoft.com/office/powerpoint/2010/main" val="2372986704"/>
-      </p:ext>
-    </p:extLst>
-  </p:cSld>
-  <p:clrMapOvr>
-    <a:masterClrMapping/>
-  </p:clrMapOvr>
-</p:sld>
-</file>
-
-<file path=ppt/slides/slide11.xml><?xml version="1.0" encoding="utf-8"?>
-<p:sld xmlns:a="http://schemas.openxmlformats.org/drawingml/2006/main" xmlns:r="http://schemas.openxmlformats.org/officeDocument/2006/relationships" xmlns:p="http://schemas.openxmlformats.org/presentationml/2006/main">
-  <p:cSld>
-    <p:spTree>
-      <p:nvGrpSpPr>
-        <p:cNvPr id="1" name=""/>
-        <p:cNvGrpSpPr/>
-        <p:nvPr/>
-      </p:nvGrpSpPr>
-      <p:grpSpPr>
-        <a:xfrm>
-          <a:off x="0" y="0"/>
-          <a:ext cx="0" cy="0"/>
-          <a:chOff x="0" y="0"/>
-          <a:chExt cx="0" cy="0"/>
-        </a:xfrm>
-      </p:grpSpPr>
-      <p:sp>
-        <p:nvSpPr>
-          <p:cNvPr id="2" name="Titre 1">
-            <a:extLst>
-              <a:ext uri="{FF2B5EF4-FFF2-40B4-BE49-F238E27FC236}">
-                <a16:creationId xmlns:a16="http://schemas.microsoft.com/office/drawing/2014/main" id="{6B2469CE-1ECE-BF74-8055-1A8E683FB831}"/>
-              </a:ext>
-            </a:extLst>
-          </p:cNvPr>
-          <p:cNvSpPr>
-            <a:spLocks noGrp="1"/>
-          </p:cNvSpPr>
-          <p:nvPr>
-            <p:ph type="title"/>
-          </p:nvPr>
-        </p:nvSpPr>
-        <p:spPr/>
-        <p:txBody>
-          <a:bodyPr/>
-          <a:lstStyle/>
-          <a:p>
-            <a:r>
-              <a:rPr lang="fr-FR" dirty="0" err="1"/>
-              <a:t>Wearable</a:t>
-            </a:r>
-            <a:endParaRPr lang="fr-FR" dirty="0"/>
-          </a:p>
-        </p:txBody>
-      </p:sp>
-      <p:sp>
-        <p:nvSpPr>
-          <p:cNvPr id="3" name="Espace réservé du contenu 2">
-            <a:extLst>
-              <a:ext uri="{FF2B5EF4-FFF2-40B4-BE49-F238E27FC236}">
-                <a16:creationId xmlns:a16="http://schemas.microsoft.com/office/drawing/2014/main" id="{F8ACE3D0-F156-EFFB-4374-93D7DFDF5D86}"/>
-              </a:ext>
-            </a:extLst>
-          </p:cNvPr>
-          <p:cNvSpPr>
-            <a:spLocks noGrp="1"/>
-          </p:cNvSpPr>
-          <p:nvPr>
-            <p:ph idx="1"/>
-          </p:nvPr>
-        </p:nvSpPr>
-        <p:spPr/>
-        <p:txBody>
-          <a:bodyPr/>
-          <a:lstStyle/>
-          <a:p>
-            <a:r>
-              <a:rPr lang="fr-FR" dirty="0"/>
-              <a:t>Montre</a:t>
-            </a:r>
-          </a:p>
-          <a:p>
-            <a:r>
-              <a:rPr lang="fr-FR" dirty="0"/>
-              <a:t>Bracelets</a:t>
-            </a:r>
-          </a:p>
-          <a:p>
-            <a:r>
-              <a:rPr lang="fr-FR" dirty="0"/>
-              <a:t>Bijoux</a:t>
-            </a:r>
-          </a:p>
-          <a:p>
-            <a:r>
-              <a:rPr lang="fr-FR" dirty="0"/>
-              <a:t>Habits</a:t>
-            </a:r>
-          </a:p>
-        </p:txBody>
-      </p:sp>
-      <p:pic>
-        <p:nvPicPr>
-          <p:cNvPr id="5" name="Image 4">
-            <a:extLst>
-              <a:ext uri="{FF2B5EF4-FFF2-40B4-BE49-F238E27FC236}">
-                <a16:creationId xmlns:a16="http://schemas.microsoft.com/office/drawing/2014/main" id="{B7040651-8CB2-4C85-2BFD-09A782ED0392}"/>
-              </a:ext>
-            </a:extLst>
-          </p:cNvPr>
-          <p:cNvPicPr>
-            <a:picLocks noChangeAspect="1"/>
-          </p:cNvPicPr>
-          <p:nvPr/>
-        </p:nvPicPr>
-        <p:blipFill>
-          <a:blip r:embed="rId2"/>
-          <a:stretch>
-            <a:fillRect/>
-          </a:stretch>
-        </p:blipFill>
-        <p:spPr>
-          <a:xfrm>
-            <a:off x="2580997" y="1428471"/>
-            <a:ext cx="3982006" cy="4001058"/>
-          </a:xfrm>
-          <a:prstGeom prst="rect">
-            <a:avLst/>
-          </a:prstGeom>
-        </p:spPr>
-      </p:pic>
-    </p:spTree>
-    <p:extLst>
-      <p:ext uri="{BB962C8B-B14F-4D97-AF65-F5344CB8AC3E}">
-        <p14:creationId xmlns:p14="http://schemas.microsoft.com/office/powerpoint/2010/main" val="2877955094"/>
-      </p:ext>
-    </p:extLst>
-  </p:cSld>
-  <p:clrMapOvr>
-    <a:masterClrMapping/>
-  </p:clrMapOvr>
-</p:sld>
-</file>
-
-<file path=ppt/slides/slide12.xml><?xml version="1.0" encoding="utf-8"?>
-<p:sld xmlns:a="http://schemas.openxmlformats.org/drawingml/2006/main" xmlns:r="http://schemas.openxmlformats.org/officeDocument/2006/relationships" xmlns:p="http://schemas.openxmlformats.org/presentationml/2006/main">
-  <p:cSld>
-    <p:spTree>
-      <p:nvGrpSpPr>
-        <p:cNvPr id="1" name=""/>
-        <p:cNvGrpSpPr/>
-        <p:nvPr/>
-      </p:nvGrpSpPr>
-      <p:grpSpPr>
-        <a:xfrm>
-          <a:off x="0" y="0"/>
-          <a:ext cx="0" cy="0"/>
-          <a:chOff x="0" y="0"/>
-          <a:chExt cx="0" cy="0"/>
-        </a:xfrm>
-      </p:grpSpPr>
-      <p:sp>
-        <p:nvSpPr>
-          <p:cNvPr id="2" name="Titre 1">
-            <a:extLst>
-              <a:ext uri="{FF2B5EF4-FFF2-40B4-BE49-F238E27FC236}">
-                <a16:creationId xmlns:a16="http://schemas.microsoft.com/office/drawing/2014/main" id="{ECE4E122-D110-308E-F133-0574C84A4468}"/>
-              </a:ext>
-            </a:extLst>
-          </p:cNvPr>
-          <p:cNvSpPr>
-            <a:spLocks noGrp="1"/>
-          </p:cNvSpPr>
-          <p:nvPr>
-            <p:ph type="title"/>
-          </p:nvPr>
-        </p:nvSpPr>
-        <p:spPr/>
-        <p:txBody>
-          <a:bodyPr/>
-          <a:lstStyle/>
-          <a:p>
-            <a:r>
-              <a:rPr lang="fr-FR" dirty="0"/>
-              <a:t>Valeur des services associés</a:t>
-            </a:r>
-          </a:p>
-        </p:txBody>
-      </p:sp>
-      <p:sp>
-        <p:nvSpPr>
-          <p:cNvPr id="3" name="Espace réservé du contenu 2">
-            <a:extLst>
-              <a:ext uri="{FF2B5EF4-FFF2-40B4-BE49-F238E27FC236}">
-                <a16:creationId xmlns:a16="http://schemas.microsoft.com/office/drawing/2014/main" id="{054CAAC7-B7D2-1EFF-4D60-DE2A5254CB5C}"/>
-              </a:ext>
-            </a:extLst>
-          </p:cNvPr>
-          <p:cNvSpPr>
-            <a:spLocks noGrp="1"/>
-          </p:cNvSpPr>
-          <p:nvPr>
-            <p:ph idx="1"/>
-          </p:nvPr>
-        </p:nvSpPr>
-        <p:spPr/>
-        <p:txBody>
-          <a:bodyPr/>
-          <a:lstStyle/>
-          <a:p>
-            <a:r>
-              <a:rPr lang="fr-FR" dirty="0"/>
-              <a:t>Les services IoT ne se limitent pas à la connectivité</a:t>
-            </a:r>
-          </a:p>
-          <a:p>
-            <a:pPr lvl="1"/>
-            <a:r>
-              <a:rPr lang="fr-FR" dirty="0"/>
-              <a:t>ils créent une valeur ajoutée stratégique pour les entreprises en transformant les produits en solutions complètes</a:t>
-            </a:r>
-          </a:p>
-          <a:p>
-            <a:r>
-              <a:rPr lang="fr-FR" dirty="0"/>
-              <a:t>Maintenance prédictive et surveillance à distance</a:t>
-            </a:r>
-          </a:p>
-          <a:p>
-            <a:pPr lvl="1"/>
-            <a:r>
-              <a:rPr lang="fr-FR" dirty="0"/>
-              <a:t>Réduction des arrêts imprévus, prolongation de la durée de vie des équipements, baisse des coûts de maintenance</a:t>
-            </a:r>
-          </a:p>
-          <a:p>
-            <a:r>
-              <a:rPr lang="fr-FR" dirty="0"/>
-              <a:t>Alertes et notifications en temps réel</a:t>
-            </a:r>
-          </a:p>
-          <a:p>
-            <a:pPr lvl="1"/>
-            <a:r>
-              <a:rPr lang="fr-FR" dirty="0"/>
-              <a:t>amélioration de la réactivité opérationnelle et réduction des pertes</a:t>
-            </a:r>
-          </a:p>
-        </p:txBody>
-      </p:sp>
-    </p:spTree>
-    <p:extLst>
-      <p:ext uri="{BB962C8B-B14F-4D97-AF65-F5344CB8AC3E}">
-        <p14:creationId xmlns:p14="http://schemas.microsoft.com/office/powerpoint/2010/main" val="1249577033"/>
-      </p:ext>
-    </p:extLst>
-  </p:cSld>
-  <p:clrMapOvr>
-    <a:masterClrMapping/>
-  </p:clrMapOvr>
-</p:sld>
-</file>
-
-<file path=ppt/slides/slide13.xml><?xml version="1.0" encoding="utf-8"?>
-<p:sld xmlns:a="http://schemas.openxmlformats.org/drawingml/2006/main" xmlns:r="http://schemas.openxmlformats.org/officeDocument/2006/relationships" xmlns:p="http://schemas.openxmlformats.org/presentationml/2006/main">
-  <p:cSld>
-    <p:spTree>
-      <p:nvGrpSpPr>
-        <p:cNvPr id="1" name=""/>
-        <p:cNvGrpSpPr/>
-        <p:nvPr/>
-      </p:nvGrpSpPr>
-      <p:grpSpPr>
-        <a:xfrm>
-          <a:off x="0" y="0"/>
-          <a:ext cx="0" cy="0"/>
-          <a:chOff x="0" y="0"/>
-          <a:chExt cx="0" cy="0"/>
-        </a:xfrm>
-      </p:grpSpPr>
-      <p:sp>
-        <p:nvSpPr>
-          <p:cNvPr id="2" name="Titre 1">
-            <a:extLst>
-              <a:ext uri="{FF2B5EF4-FFF2-40B4-BE49-F238E27FC236}">
-                <a16:creationId xmlns:a16="http://schemas.microsoft.com/office/drawing/2014/main" id="{29967F07-0CCD-A1DE-D856-978F1C8C5A31}"/>
-              </a:ext>
-            </a:extLst>
-          </p:cNvPr>
-          <p:cNvSpPr>
-            <a:spLocks noGrp="1"/>
-          </p:cNvSpPr>
-          <p:nvPr>
-            <p:ph type="title"/>
-          </p:nvPr>
-        </p:nvSpPr>
-        <p:spPr/>
-        <p:txBody>
-          <a:bodyPr/>
-          <a:lstStyle/>
-          <a:p>
-            <a:r>
-              <a:rPr lang="fr-FR" dirty="0"/>
-              <a:t>Valeur des services associés</a:t>
-            </a:r>
-          </a:p>
-        </p:txBody>
-      </p:sp>
-      <p:sp>
-        <p:nvSpPr>
-          <p:cNvPr id="3" name="Espace réservé du contenu 2">
-            <a:extLst>
-              <a:ext uri="{FF2B5EF4-FFF2-40B4-BE49-F238E27FC236}">
-                <a16:creationId xmlns:a16="http://schemas.microsoft.com/office/drawing/2014/main" id="{CFBD019C-7A52-D12F-10CB-C12496271DE8}"/>
-              </a:ext>
-            </a:extLst>
-          </p:cNvPr>
-          <p:cNvSpPr>
-            <a:spLocks noGrp="1"/>
-          </p:cNvSpPr>
-          <p:nvPr>
-            <p:ph idx="1"/>
-          </p:nvPr>
-        </p:nvSpPr>
-        <p:spPr/>
-        <p:txBody>
-          <a:bodyPr/>
-          <a:lstStyle/>
-          <a:p>
-            <a:r>
-              <a:rPr lang="fr-FR" dirty="0"/>
-              <a:t>Tableaux de bord et analytique avancé</a:t>
-            </a:r>
-          </a:p>
-          <a:p>
-            <a:pPr lvl="1"/>
-            <a:r>
-              <a:rPr lang="fr-FR" dirty="0"/>
-              <a:t>Suivi des performances, optimisation des processus et pilotage basé sur les données</a:t>
-            </a:r>
-          </a:p>
-          <a:p>
-            <a:r>
-              <a:rPr lang="fr-FR" dirty="0"/>
-              <a:t>Services managés IoT</a:t>
-            </a:r>
-          </a:p>
-          <a:p>
-            <a:pPr lvl="1"/>
-            <a:r>
-              <a:rPr lang="fr-FR" dirty="0"/>
-              <a:t>Externalisation de la gestion des infrastructures pour se concentrer sur l’innovation et la valeur métier</a:t>
-            </a:r>
-          </a:p>
-        </p:txBody>
-      </p:sp>
-    </p:spTree>
-    <p:extLst>
-      <p:ext uri="{BB962C8B-B14F-4D97-AF65-F5344CB8AC3E}">
-        <p14:creationId xmlns:p14="http://schemas.microsoft.com/office/powerpoint/2010/main" val="434243690"/>
-      </p:ext>
-    </p:extLst>
-  </p:cSld>
-  <p:clrMapOvr>
-    <a:masterClrMapping/>
-  </p:clrMapOvr>
-</p:sld>
-</file>
-
-<file path=ppt/slides/slide14.xml><?xml version="1.0" encoding="utf-8"?>
-<p:sld xmlns:a="http://schemas.openxmlformats.org/drawingml/2006/main" xmlns:r="http://schemas.openxmlformats.org/officeDocument/2006/relationships" xmlns:p="http://schemas.openxmlformats.org/presentationml/2006/main">
-  <p:cSld>
-    <p:spTree>
-      <p:nvGrpSpPr>
-        <p:cNvPr id="1" name=""/>
-        <p:cNvGrpSpPr/>
-        <p:nvPr/>
-      </p:nvGrpSpPr>
-      <p:grpSpPr>
-        <a:xfrm>
-          <a:off x="0" y="0"/>
-          <a:ext cx="0" cy="0"/>
-          <a:chOff x="0" y="0"/>
-          <a:chExt cx="0" cy="0"/>
-        </a:xfrm>
-      </p:grpSpPr>
-      <p:sp>
-        <p:nvSpPr>
-          <p:cNvPr id="2" name="Titre 1">
-            <a:extLst>
-              <a:ext uri="{FF2B5EF4-FFF2-40B4-BE49-F238E27FC236}">
-                <a16:creationId xmlns:a16="http://schemas.microsoft.com/office/drawing/2014/main" id="{A617E6CE-CBD5-98D9-55EA-5A8243D189B8}"/>
-              </a:ext>
-            </a:extLst>
-          </p:cNvPr>
-          <p:cNvSpPr>
-            <a:spLocks noGrp="1"/>
-          </p:cNvSpPr>
-          <p:nvPr>
-            <p:ph type="title"/>
-          </p:nvPr>
-        </p:nvSpPr>
-        <p:spPr/>
-        <p:txBody>
-          <a:bodyPr/>
-          <a:lstStyle/>
-          <a:p>
-            <a:r>
-              <a:rPr lang="fr-FR" dirty="0"/>
-              <a:t>Opportunités stratégiques pour les entreprises</a:t>
-            </a:r>
-          </a:p>
-        </p:txBody>
-      </p:sp>
-      <p:sp>
-        <p:nvSpPr>
-          <p:cNvPr id="3" name="Espace réservé du contenu 2">
-            <a:extLst>
-              <a:ext uri="{FF2B5EF4-FFF2-40B4-BE49-F238E27FC236}">
-                <a16:creationId xmlns:a16="http://schemas.microsoft.com/office/drawing/2014/main" id="{EB3B5CF3-6E25-E3E8-6AA8-0EB946A5CEC8}"/>
-              </a:ext>
-            </a:extLst>
-          </p:cNvPr>
-          <p:cNvSpPr>
-            <a:spLocks noGrp="1"/>
-          </p:cNvSpPr>
-          <p:nvPr>
-            <p:ph idx="1"/>
-          </p:nvPr>
-        </p:nvSpPr>
-        <p:spPr/>
-        <p:txBody>
-          <a:bodyPr/>
-          <a:lstStyle/>
-          <a:p>
-            <a:r>
-              <a:rPr lang="fr-FR" sz="2400" dirty="0"/>
-              <a:t>L’IoT ouvre des perspectives dans plusieurs dimensions</a:t>
-            </a:r>
-          </a:p>
-          <a:p>
-            <a:r>
-              <a:rPr lang="fr-FR" sz="2400" dirty="0"/>
-              <a:t>Nouveaux modèles économiques</a:t>
-            </a:r>
-          </a:p>
-          <a:p>
-            <a:pPr lvl="1"/>
-            <a:r>
-              <a:rPr lang="fr-FR" sz="2000" dirty="0"/>
-              <a:t>passage du produit à l’usage (abonnements, facturation à la performance), création de revenus récurrents</a:t>
-            </a:r>
-          </a:p>
-          <a:p>
-            <a:r>
-              <a:rPr lang="fr-FR" sz="2400" dirty="0"/>
-              <a:t>Optimisation opérationnelle</a:t>
-            </a:r>
-          </a:p>
-          <a:p>
-            <a:pPr lvl="1"/>
-            <a:r>
-              <a:rPr lang="fr-FR" sz="2000" dirty="0"/>
-              <a:t>réduction des coûts (jusqu’à 20 %), amélioration de la productivité (+30 %), automatisation des processus</a:t>
-            </a:r>
-          </a:p>
-          <a:p>
-            <a:r>
-              <a:rPr lang="fr-FR" sz="2400" dirty="0"/>
-              <a:t>Expérience client enrichie</a:t>
-            </a:r>
-          </a:p>
-          <a:p>
-            <a:pPr lvl="1"/>
-            <a:r>
-              <a:rPr lang="fr-FR" sz="2000" dirty="0"/>
-              <a:t>services personnalisés, suivi proactif, relation continue grâce aux données</a:t>
-            </a:r>
-          </a:p>
-          <a:p>
-            <a:r>
-              <a:rPr lang="fr-FR" sz="2400" dirty="0"/>
-              <a:t>Innovation sectorielle</a:t>
-            </a:r>
-          </a:p>
-          <a:p>
-            <a:pPr lvl="1"/>
-            <a:r>
-              <a:rPr lang="fr-FR" sz="2000" dirty="0"/>
-              <a:t>santé (monitoring patient), agriculture (irrigation intelligente), industrie (chaînes d’approvisionnement optimisées), smart </a:t>
-            </a:r>
-            <a:r>
-              <a:rPr lang="fr-FR" sz="2000" dirty="0" err="1"/>
-              <a:t>cities</a:t>
-            </a:r>
-            <a:r>
-              <a:rPr lang="fr-FR" sz="2000" dirty="0"/>
-              <a:t> (gestion énergétique)</a:t>
-            </a:r>
-          </a:p>
-        </p:txBody>
-      </p:sp>
-    </p:spTree>
-    <p:extLst>
-      <p:ext uri="{BB962C8B-B14F-4D97-AF65-F5344CB8AC3E}">
-        <p14:creationId xmlns:p14="http://schemas.microsoft.com/office/powerpoint/2010/main" val="3389373864"/>
-      </p:ext>
-    </p:extLst>
-  </p:cSld>
-  <p:clrMapOvr>
-    <a:masterClrMapping/>
-  </p:clrMapOvr>
-</p:sld>
-</file>
-
-<file path=ppt/slides/slide15.xml><?xml version="1.0" encoding="utf-8"?>
-<p:sld xmlns:a="http://schemas.openxmlformats.org/drawingml/2006/main" xmlns:r="http://schemas.openxmlformats.org/officeDocument/2006/relationships" xmlns:p="http://schemas.openxmlformats.org/presentationml/2006/main">
-  <p:cSld>
-    <p:spTree>
-      <p:nvGrpSpPr>
-        <p:cNvPr id="1" name=""/>
-        <p:cNvGrpSpPr/>
-        <p:nvPr/>
-      </p:nvGrpSpPr>
-      <p:grpSpPr>
-        <a:xfrm>
-          <a:off x="0" y="0"/>
-          <a:ext cx="0" cy="0"/>
-          <a:chOff x="0" y="0"/>
-          <a:chExt cx="0" cy="0"/>
-        </a:xfrm>
-      </p:grpSpPr>
-      <p:sp>
-        <p:nvSpPr>
-          <p:cNvPr id="2" name="Titre 1">
-            <a:extLst>
-              <a:ext uri="{FF2B5EF4-FFF2-40B4-BE49-F238E27FC236}">
-                <a16:creationId xmlns:a16="http://schemas.microsoft.com/office/drawing/2014/main" id="{B2FBB431-1C30-F78C-5BB9-48C71C8B1402}"/>
-              </a:ext>
-            </a:extLst>
-          </p:cNvPr>
-          <p:cNvSpPr>
-            <a:spLocks noGrp="1"/>
-          </p:cNvSpPr>
-          <p:nvPr>
-            <p:ph type="title"/>
-          </p:nvPr>
-        </p:nvSpPr>
-        <p:spPr/>
-        <p:txBody>
-          <a:bodyPr/>
-          <a:lstStyle/>
-          <a:p>
-            <a:r>
-              <a:rPr lang="fr-FR" dirty="0"/>
-              <a:t>Tendances clés à intégrer</a:t>
-            </a:r>
-          </a:p>
-        </p:txBody>
-      </p:sp>
-      <p:sp>
-        <p:nvSpPr>
-          <p:cNvPr id="3" name="Espace réservé du contenu 2">
-            <a:extLst>
-              <a:ext uri="{FF2B5EF4-FFF2-40B4-BE49-F238E27FC236}">
-                <a16:creationId xmlns:a16="http://schemas.microsoft.com/office/drawing/2014/main" id="{9655862F-F5FC-69F7-B1D1-786B88CCC730}"/>
-              </a:ext>
-            </a:extLst>
-          </p:cNvPr>
-          <p:cNvSpPr>
-            <a:spLocks noGrp="1"/>
-          </p:cNvSpPr>
-          <p:nvPr>
-            <p:ph idx="1"/>
-          </p:nvPr>
-        </p:nvSpPr>
-        <p:spPr/>
-        <p:txBody>
-          <a:bodyPr/>
-          <a:lstStyle/>
-          <a:p>
-            <a:r>
-              <a:rPr lang="fr-FR" dirty="0" err="1"/>
-              <a:t>Servitisation</a:t>
-            </a:r>
-            <a:endParaRPr lang="fr-FR" dirty="0"/>
-          </a:p>
-          <a:p>
-            <a:pPr lvl="1"/>
-            <a:r>
-              <a:rPr lang="fr-FR" dirty="0"/>
-              <a:t>la valeur se déplace vers les services et la donnée, plutôt que le produit seul</a:t>
-            </a:r>
-          </a:p>
-          <a:p>
-            <a:r>
-              <a:rPr lang="fr-FR" dirty="0"/>
-              <a:t>Écosystèmes collaboratifs</a:t>
-            </a:r>
-          </a:p>
-          <a:p>
-            <a:pPr lvl="1"/>
-            <a:r>
-              <a:rPr lang="fr-FR" dirty="0"/>
-              <a:t>alliances entre fabricants, opérateurs cloud et fournisseurs de services pour créer des solutions intégrées</a:t>
-            </a:r>
-          </a:p>
-          <a:p>
-            <a:r>
-              <a:rPr lang="fr-FR" dirty="0"/>
-              <a:t>Technologies catalyseurs</a:t>
-            </a:r>
-          </a:p>
-          <a:p>
-            <a:pPr lvl="1"/>
-            <a:r>
-              <a:rPr lang="fr-FR" dirty="0"/>
-              <a:t>5G, IA, </a:t>
-            </a:r>
-            <a:r>
-              <a:rPr lang="fr-FR" dirty="0" err="1"/>
-              <a:t>edge</a:t>
-            </a:r>
-            <a:r>
-              <a:rPr lang="fr-FR" dirty="0"/>
-              <a:t> </a:t>
-            </a:r>
-            <a:r>
-              <a:rPr lang="fr-FR" dirty="0" err="1"/>
-              <a:t>computing</a:t>
-            </a:r>
-            <a:r>
-              <a:rPr lang="fr-FR" dirty="0"/>
-              <a:t> pour des services temps réel et sécurisés.</a:t>
-            </a:r>
-          </a:p>
-        </p:txBody>
-      </p:sp>
-    </p:spTree>
-    <p:extLst>
-      <p:ext uri="{BB962C8B-B14F-4D97-AF65-F5344CB8AC3E}">
-        <p14:creationId xmlns:p14="http://schemas.microsoft.com/office/powerpoint/2010/main" val="391816305"/>
-      </p:ext>
-    </p:extLst>
-  </p:cSld>
-  <p:clrMapOvr>
-    <a:masterClrMapping/>
-  </p:clrMapOvr>
-</p:sld>
-</file>
-
-<file path=ppt/slides/slide16.xml><?xml version="1.0" encoding="utf-8"?>
-<p:sld xmlns:a="http://schemas.openxmlformats.org/drawingml/2006/main" xmlns:r="http://schemas.openxmlformats.org/officeDocument/2006/relationships" xmlns:p="http://schemas.openxmlformats.org/presentationml/2006/main">
-  <p:cSld>
-    <p:spTree>
-      <p:nvGrpSpPr>
-        <p:cNvPr id="1" name=""/>
-        <p:cNvGrpSpPr/>
-        <p:nvPr/>
-      </p:nvGrpSpPr>
-      <p:grpSpPr>
-        <a:xfrm>
-          <a:off x="0" y="0"/>
-          <a:ext cx="0" cy="0"/>
-          <a:chOff x="0" y="0"/>
-          <a:chExt cx="0" cy="0"/>
-        </a:xfrm>
-      </p:grpSpPr>
-      <p:sp>
-        <p:nvSpPr>
-          <p:cNvPr id="2" name="Titre 1">
-            <a:extLst>
-              <a:ext uri="{FF2B5EF4-FFF2-40B4-BE49-F238E27FC236}">
-                <a16:creationId xmlns:a16="http://schemas.microsoft.com/office/drawing/2014/main" id="{47BD74CF-5E83-308D-7E34-67EE4AA19A6A}"/>
-              </a:ext>
-            </a:extLst>
-          </p:cNvPr>
-          <p:cNvSpPr>
-            <a:spLocks noGrp="1"/>
-          </p:cNvSpPr>
-          <p:nvPr>
-            <p:ph type="title"/>
-          </p:nvPr>
-        </p:nvSpPr>
-        <p:spPr/>
-        <p:txBody>
-          <a:bodyPr/>
-          <a:lstStyle/>
-          <a:p>
-            <a:r>
-              <a:rPr lang="fr-FR" dirty="0"/>
-              <a:t>Sécurité</a:t>
-            </a:r>
-          </a:p>
-        </p:txBody>
-      </p:sp>
-      <p:sp>
-        <p:nvSpPr>
-          <p:cNvPr id="3" name="Espace réservé du contenu 2">
-            <a:extLst>
-              <a:ext uri="{FF2B5EF4-FFF2-40B4-BE49-F238E27FC236}">
-                <a16:creationId xmlns:a16="http://schemas.microsoft.com/office/drawing/2014/main" id="{D91FDB34-D62C-BC10-B900-A8825E08F9C9}"/>
-              </a:ext>
-            </a:extLst>
-          </p:cNvPr>
-          <p:cNvSpPr>
-            <a:spLocks noGrp="1"/>
-          </p:cNvSpPr>
-          <p:nvPr>
-            <p:ph idx="1"/>
-          </p:nvPr>
-        </p:nvSpPr>
-        <p:spPr/>
-        <p:txBody>
-          <a:bodyPr/>
-          <a:lstStyle/>
-          <a:p>
-            <a:r>
-              <a:rPr lang="fr-FR" dirty="0"/>
-              <a:t>Sécurité et confidentialité des données</a:t>
-            </a:r>
-          </a:p>
-          <a:p>
-            <a:r>
-              <a:rPr lang="fr-FR" dirty="0"/>
-              <a:t>Enjeu majeur pour la confiance et la conformité*</a:t>
-            </a:r>
-          </a:p>
-          <a:p>
-            <a:r>
-              <a:rPr lang="fr-FR" dirty="0"/>
-              <a:t>Piratage</a:t>
-            </a:r>
-          </a:p>
-          <a:p>
-            <a:r>
-              <a:rPr lang="fr-FR" dirty="0"/>
-              <a:t>Données personnelles ?</a:t>
-            </a:r>
-          </a:p>
-          <a:p>
-            <a:r>
-              <a:rPr lang="fr-FR" dirty="0"/>
-              <a:t>RGPD</a:t>
-            </a:r>
-          </a:p>
-          <a:p>
-            <a:r>
-              <a:rPr lang="fr-FR" dirty="0"/>
-              <a:t>AI </a:t>
-            </a:r>
-            <a:r>
-              <a:rPr lang="fr-FR" dirty="0" err="1"/>
-              <a:t>Act</a:t>
-            </a:r>
-            <a:endParaRPr lang="fr-FR" dirty="0"/>
-          </a:p>
-        </p:txBody>
-      </p:sp>
-    </p:spTree>
-    <p:extLst>
-      <p:ext uri="{BB962C8B-B14F-4D97-AF65-F5344CB8AC3E}">
-        <p14:creationId xmlns:p14="http://schemas.microsoft.com/office/powerpoint/2010/main" val="267840560"/>
-      </p:ext>
-    </p:extLst>
-  </p:cSld>
-  <p:clrMapOvr>
-    <a:masterClrMapping/>
-  </p:clrMapOvr>
-</p:sld>
-</file>
-
-<file path=ppt/slides/slide17.xml><?xml version="1.0" encoding="utf-8"?>
-<p:sld xmlns:a="http://schemas.openxmlformats.org/drawingml/2006/main" xmlns:r="http://schemas.openxmlformats.org/officeDocument/2006/relationships" xmlns:p="http://schemas.openxmlformats.org/presentationml/2006/main">
-  <p:cSld>
-    <p:spTree>
-      <p:nvGrpSpPr>
-        <p:cNvPr id="1" name=""/>
-        <p:cNvGrpSpPr/>
-        <p:nvPr/>
-      </p:nvGrpSpPr>
-      <p:grpSpPr>
-        <a:xfrm>
-          <a:off x="0" y="0"/>
-          <a:ext cx="0" cy="0"/>
-          <a:chOff x="0" y="0"/>
-          <a:chExt cx="0" cy="0"/>
-        </a:xfrm>
-      </p:grpSpPr>
-      <p:sp>
-        <p:nvSpPr>
-          <p:cNvPr id="2" name="Titre 1">
-            <a:extLst>
-              <a:ext uri="{FF2B5EF4-FFF2-40B4-BE49-F238E27FC236}">
-                <a16:creationId xmlns:a16="http://schemas.microsoft.com/office/drawing/2014/main" id="{3248C430-3BBD-0521-A713-C08CD5B0C91F}"/>
-              </a:ext>
-            </a:extLst>
-          </p:cNvPr>
-          <p:cNvSpPr>
-            <a:spLocks noGrp="1"/>
-          </p:cNvSpPr>
-          <p:nvPr>
-            <p:ph type="title"/>
-          </p:nvPr>
-        </p:nvSpPr>
-        <p:spPr/>
-        <p:txBody>
-          <a:bodyPr/>
-          <a:lstStyle/>
-          <a:p>
-            <a:r>
-              <a:rPr lang="fr-FR" dirty="0"/>
-              <a:t>Enjeux énergétiques</a:t>
-            </a:r>
-          </a:p>
-        </p:txBody>
-      </p:sp>
-      <p:sp>
-        <p:nvSpPr>
-          <p:cNvPr id="3" name="Espace réservé du contenu 2">
-            <a:extLst>
-              <a:ext uri="{FF2B5EF4-FFF2-40B4-BE49-F238E27FC236}">
-                <a16:creationId xmlns:a16="http://schemas.microsoft.com/office/drawing/2014/main" id="{7FB2D37D-9522-9637-6CDE-3C64F25085BB}"/>
-              </a:ext>
-            </a:extLst>
-          </p:cNvPr>
-          <p:cNvSpPr>
-            <a:spLocks noGrp="1"/>
-          </p:cNvSpPr>
-          <p:nvPr>
-            <p:ph idx="1"/>
-          </p:nvPr>
-        </p:nvSpPr>
-        <p:spPr/>
-        <p:txBody>
-          <a:bodyPr/>
-          <a:lstStyle/>
-          <a:p>
-            <a:r>
-              <a:rPr lang="fr-FR" dirty="0"/>
-              <a:t>Smart Cities</a:t>
-            </a:r>
-          </a:p>
-          <a:p>
-            <a:pPr lvl="1"/>
-            <a:r>
-              <a:rPr lang="fr-FR" dirty="0"/>
-              <a:t>Déporter le calcul de consommation en Edge </a:t>
-            </a:r>
-            <a:r>
-              <a:rPr lang="fr-FR" dirty="0" err="1"/>
-              <a:t>Computing</a:t>
-            </a:r>
-            <a:endParaRPr lang="fr-FR" dirty="0"/>
-          </a:p>
-          <a:p>
-            <a:pPr lvl="1"/>
-            <a:r>
-              <a:rPr lang="fr-FR" dirty="0"/>
-              <a:t>Linky</a:t>
-            </a:r>
-          </a:p>
-          <a:p>
-            <a:pPr lvl="1"/>
-            <a:r>
-              <a:rPr lang="fr-FR" dirty="0"/>
-              <a:t>IA</a:t>
-            </a:r>
-          </a:p>
-          <a:p>
-            <a:r>
-              <a:rPr lang="fr-FR" dirty="0"/>
-              <a:t>Batterie des voitures</a:t>
-            </a:r>
-          </a:p>
-          <a:p>
-            <a:pPr lvl="1"/>
-            <a:r>
-              <a:rPr lang="fr-FR" dirty="0"/>
-              <a:t>Chargement intelligent</a:t>
-            </a:r>
-          </a:p>
-          <a:p>
-            <a:pPr lvl="1"/>
-            <a:r>
-              <a:rPr lang="fr-FR" dirty="0"/>
-              <a:t>Heures creuses calculées à la seconde</a:t>
-            </a:r>
-          </a:p>
-          <a:p>
-            <a:pPr lvl="1"/>
-            <a:r>
-              <a:rPr lang="fr-FR" dirty="0"/>
-              <a:t>Réinjection de l'énergie de la batterie dans le réseau</a:t>
-            </a:r>
-          </a:p>
-          <a:p>
-            <a:pPr lvl="1"/>
-            <a:r>
-              <a:rPr lang="fr-FR" dirty="0"/>
-              <a:t>Meilleure gestion des énergie alternatives (Solaire, …)</a:t>
-            </a:r>
-          </a:p>
-          <a:p>
-            <a:pPr lvl="1"/>
-            <a:r>
-              <a:rPr lang="fr-FR" dirty="0"/>
-              <a:t>Incident électrique majeur en Espagne</a:t>
-            </a:r>
-          </a:p>
-          <a:p>
-            <a:pPr lvl="1"/>
-            <a:endParaRPr lang="fr-FR" dirty="0"/>
-          </a:p>
-        </p:txBody>
-      </p:sp>
-    </p:spTree>
-    <p:extLst>
-      <p:ext uri="{BB962C8B-B14F-4D97-AF65-F5344CB8AC3E}">
-        <p14:creationId xmlns:p14="http://schemas.microsoft.com/office/powerpoint/2010/main" val="1861710007"/>
-      </p:ext>
-    </p:extLst>
-  </p:cSld>
-  <p:clrMapOvr>
-    <a:masterClrMapping/>
-  </p:clrMapOvr>
-</p:sld>
-</file>
-
 <file path=ppt/slides/slide2.xml><?xml version="1.0" encoding="utf-8"?>
 <p:sld xmlns:a="http://schemas.openxmlformats.org/drawingml/2006/main" xmlns:r="http://schemas.openxmlformats.org/officeDocument/2006/relationships" xmlns:p="http://schemas.openxmlformats.org/presentationml/2006/main">
   <p:cSld>
@@ -5005,228 +3942,6 @@
           <p:cNvPr id="2" name="Titre 1">
             <a:extLst>
               <a:ext uri="{FF2B5EF4-FFF2-40B4-BE49-F238E27FC236}">
-                <a16:creationId xmlns:a16="http://schemas.microsoft.com/office/drawing/2014/main" id="{12C1A9D0-8A0D-2092-38DE-FB61D7016DC8}"/>
-              </a:ext>
-            </a:extLst>
-          </p:cNvPr>
-          <p:cNvSpPr>
-            <a:spLocks noGrp="1"/>
-          </p:cNvSpPr>
-          <p:nvPr>
-            <p:ph type="title"/>
-          </p:nvPr>
-        </p:nvSpPr>
-        <p:spPr/>
-        <p:txBody>
-          <a:bodyPr/>
-          <a:lstStyle/>
-          <a:p>
-            <a:r>
-              <a:rPr lang="fr-FR" dirty="0"/>
-              <a:t>Amélioration de la valeur ajoutée des produits</a:t>
-            </a:r>
-          </a:p>
-        </p:txBody>
-      </p:sp>
-      <p:sp>
-        <p:nvSpPr>
-          <p:cNvPr id="3" name="Espace réservé du contenu 2">
-            <a:extLst>
-              <a:ext uri="{FF2B5EF4-FFF2-40B4-BE49-F238E27FC236}">
-                <a16:creationId xmlns:a16="http://schemas.microsoft.com/office/drawing/2014/main" id="{37294F5B-B918-50E0-BF67-048B97BAF6C6}"/>
-              </a:ext>
-            </a:extLst>
-          </p:cNvPr>
-          <p:cNvSpPr>
-            <a:spLocks noGrp="1"/>
-          </p:cNvSpPr>
-          <p:nvPr>
-            <p:ph idx="1"/>
-          </p:nvPr>
-        </p:nvSpPr>
-        <p:spPr/>
-        <p:txBody>
-          <a:bodyPr/>
-          <a:lstStyle/>
-          <a:p>
-            <a:r>
-              <a:rPr lang="fr-FR" dirty="0"/>
-              <a:t>Les produits deviennent intelligents et connectés, ce qui ouvre la voie à</a:t>
-            </a:r>
-          </a:p>
-          <a:p>
-            <a:pPr lvl="1"/>
-            <a:r>
-              <a:rPr lang="fr-FR" dirty="0"/>
-              <a:t>Surveillance en temps réel des performances et de l’état des équipements</a:t>
-            </a:r>
-          </a:p>
-          <a:p>
-            <a:pPr lvl="1"/>
-            <a:r>
-              <a:rPr lang="fr-FR" dirty="0"/>
-              <a:t>Optimisation énergétique et réduction des coûts grâce à des systèmes intelligents (smart </a:t>
-            </a:r>
-            <a:r>
-              <a:rPr lang="fr-FR" dirty="0" err="1"/>
-              <a:t>grids</a:t>
-            </a:r>
-            <a:r>
-              <a:rPr lang="fr-FR" dirty="0"/>
-              <a:t>, …)</a:t>
-            </a:r>
-          </a:p>
-          <a:p>
-            <a:pPr lvl="1"/>
-            <a:r>
-              <a:rPr lang="fr-FR" dirty="0"/>
-              <a:t>Intégration avec l'IA pour des décisions locales rapides et une meilleure sécurité</a:t>
-            </a:r>
-          </a:p>
-        </p:txBody>
-      </p:sp>
-    </p:spTree>
-    <p:extLst>
-      <p:ext uri="{BB962C8B-B14F-4D97-AF65-F5344CB8AC3E}">
-        <p14:creationId xmlns:p14="http://schemas.microsoft.com/office/powerpoint/2010/main" val="3043744575"/>
-      </p:ext>
-    </p:extLst>
-  </p:cSld>
-  <p:clrMapOvr>
-    <a:masterClrMapping/>
-  </p:clrMapOvr>
-</p:sld>
-</file>
-
-<file path=ppt/slides/slide5.xml><?xml version="1.0" encoding="utf-8"?>
-<p:sld xmlns:a="http://schemas.openxmlformats.org/drawingml/2006/main" xmlns:r="http://schemas.openxmlformats.org/officeDocument/2006/relationships" xmlns:p="http://schemas.openxmlformats.org/presentationml/2006/main">
-  <p:cSld>
-    <p:spTree>
-      <p:nvGrpSpPr>
-        <p:cNvPr id="1" name=""/>
-        <p:cNvGrpSpPr/>
-        <p:nvPr/>
-      </p:nvGrpSpPr>
-      <p:grpSpPr>
-        <a:xfrm>
-          <a:off x="0" y="0"/>
-          <a:ext cx="0" cy="0"/>
-          <a:chOff x="0" y="0"/>
-          <a:chExt cx="0" cy="0"/>
-        </a:xfrm>
-      </p:grpSpPr>
-      <p:sp>
-        <p:nvSpPr>
-          <p:cNvPr id="2" name="Titre 1">
-            <a:extLst>
-              <a:ext uri="{FF2B5EF4-FFF2-40B4-BE49-F238E27FC236}">
-                <a16:creationId xmlns:a16="http://schemas.microsoft.com/office/drawing/2014/main" id="{16C4035A-F431-1CA6-09C0-134654C21E61}"/>
-              </a:ext>
-            </a:extLst>
-          </p:cNvPr>
-          <p:cNvSpPr>
-            <a:spLocks noGrp="1"/>
-          </p:cNvSpPr>
-          <p:nvPr>
-            <p:ph type="title"/>
-          </p:nvPr>
-        </p:nvSpPr>
-        <p:spPr/>
-        <p:txBody>
-          <a:bodyPr/>
-          <a:lstStyle/>
-          <a:p>
-            <a:r>
-              <a:rPr lang="fr-FR" dirty="0"/>
-              <a:t>Expérience client enrichie</a:t>
-            </a:r>
-          </a:p>
-        </p:txBody>
-      </p:sp>
-      <p:sp>
-        <p:nvSpPr>
-          <p:cNvPr id="3" name="Espace réservé du contenu 2">
-            <a:extLst>
-              <a:ext uri="{FF2B5EF4-FFF2-40B4-BE49-F238E27FC236}">
-                <a16:creationId xmlns:a16="http://schemas.microsoft.com/office/drawing/2014/main" id="{3FD2FA15-30F5-5F19-FE84-F5DF3BE2D83C}"/>
-              </a:ext>
-            </a:extLst>
-          </p:cNvPr>
-          <p:cNvSpPr>
-            <a:spLocks noGrp="1"/>
-          </p:cNvSpPr>
-          <p:nvPr>
-            <p:ph idx="1"/>
-          </p:nvPr>
-        </p:nvSpPr>
-        <p:spPr/>
-        <p:txBody>
-          <a:bodyPr/>
-          <a:lstStyle/>
-          <a:p>
-            <a:r>
-              <a:rPr lang="fr-FR" dirty="0"/>
-              <a:t>L’IoT permet une relation plus étroite avec les clients</a:t>
-            </a:r>
-          </a:p>
-          <a:p>
-            <a:pPr lvl="1"/>
-            <a:r>
-              <a:rPr lang="fr-FR" dirty="0"/>
-              <a:t>Services proactifs basés sur les données (notifications, recommandations)</a:t>
-            </a:r>
-          </a:p>
-          <a:p>
-            <a:pPr lvl="1"/>
-            <a:r>
-              <a:rPr lang="fr-FR" dirty="0"/>
-              <a:t>Personnalisation des offres selon les préférences et l’usage</a:t>
-            </a:r>
-          </a:p>
-          <a:p>
-            <a:pPr lvl="1"/>
-            <a:r>
-              <a:rPr lang="fr-FR" dirty="0"/>
-              <a:t>Amélioration de la rapidité et de la cohérence des services, notamment dans la logistique et la livraison</a:t>
-            </a:r>
-          </a:p>
-        </p:txBody>
-      </p:sp>
-    </p:spTree>
-    <p:extLst>
-      <p:ext uri="{BB962C8B-B14F-4D97-AF65-F5344CB8AC3E}">
-        <p14:creationId xmlns:p14="http://schemas.microsoft.com/office/powerpoint/2010/main" val="997115369"/>
-      </p:ext>
-    </p:extLst>
-  </p:cSld>
-  <p:clrMapOvr>
-    <a:masterClrMapping/>
-  </p:clrMapOvr>
-</p:sld>
-</file>
-
-<file path=ppt/slides/slide6.xml><?xml version="1.0" encoding="utf-8"?>
-<p:sld xmlns:a="http://schemas.openxmlformats.org/drawingml/2006/main" xmlns:r="http://schemas.openxmlformats.org/officeDocument/2006/relationships" xmlns:p="http://schemas.openxmlformats.org/presentationml/2006/main">
-  <p:cSld>
-    <p:spTree>
-      <p:nvGrpSpPr>
-        <p:cNvPr id="1" name=""/>
-        <p:cNvGrpSpPr/>
-        <p:nvPr/>
-      </p:nvGrpSpPr>
-      <p:grpSpPr>
-        <a:xfrm>
-          <a:off x="0" y="0"/>
-          <a:ext cx="0" cy="0"/>
-          <a:chOff x="0" y="0"/>
-          <a:chExt cx="0" cy="0"/>
-        </a:xfrm>
-      </p:grpSpPr>
-      <p:sp>
-        <p:nvSpPr>
-          <p:cNvPr id="2" name="Titre 1">
-            <a:extLst>
-              <a:ext uri="{FF2B5EF4-FFF2-40B4-BE49-F238E27FC236}">
                 <a16:creationId xmlns:a16="http://schemas.microsoft.com/office/drawing/2014/main" id="{895A2354-6938-01D2-DBCD-715999D34831}"/>
               </a:ext>
             </a:extLst>
@@ -5337,126 +4052,7 @@
 </p:sld>
 </file>
 
-<file path=ppt/slides/slide7.xml><?xml version="1.0" encoding="utf-8"?>
-<p:sld xmlns:a="http://schemas.openxmlformats.org/drawingml/2006/main" xmlns:r="http://schemas.openxmlformats.org/officeDocument/2006/relationships" xmlns:p="http://schemas.openxmlformats.org/presentationml/2006/main">
-  <p:cSld>
-    <p:spTree>
-      <p:nvGrpSpPr>
-        <p:cNvPr id="1" name=""/>
-        <p:cNvGrpSpPr/>
-        <p:nvPr/>
-      </p:nvGrpSpPr>
-      <p:grpSpPr>
-        <a:xfrm>
-          <a:off x="0" y="0"/>
-          <a:ext cx="0" cy="0"/>
-          <a:chOff x="0" y="0"/>
-          <a:chExt cx="0" cy="0"/>
-        </a:xfrm>
-      </p:grpSpPr>
-      <p:sp>
-        <p:nvSpPr>
-          <p:cNvPr id="2" name="Titre 1">
-            <a:extLst>
-              <a:ext uri="{FF2B5EF4-FFF2-40B4-BE49-F238E27FC236}">
-                <a16:creationId xmlns:a16="http://schemas.microsoft.com/office/drawing/2014/main" id="{C3239543-40CA-EC7C-3E52-E5C075AAE724}"/>
-              </a:ext>
-            </a:extLst>
-          </p:cNvPr>
-          <p:cNvSpPr>
-            <a:spLocks noGrp="1"/>
-          </p:cNvSpPr>
-          <p:nvPr>
-            <p:ph type="title"/>
-          </p:nvPr>
-        </p:nvSpPr>
-        <p:spPr/>
-        <p:txBody>
-          <a:bodyPr/>
-          <a:lstStyle/>
-          <a:p>
-            <a:r>
-              <a:rPr lang="fr-FR" dirty="0"/>
-              <a:t>Défis à anticiper</a:t>
-            </a:r>
-          </a:p>
-        </p:txBody>
-      </p:sp>
-      <p:sp>
-        <p:nvSpPr>
-          <p:cNvPr id="3" name="Espace réservé du contenu 2">
-            <a:extLst>
-              <a:ext uri="{FF2B5EF4-FFF2-40B4-BE49-F238E27FC236}">
-                <a16:creationId xmlns:a16="http://schemas.microsoft.com/office/drawing/2014/main" id="{AC34AD35-FB50-E80A-99A2-1F6A4C7DB03F}"/>
-              </a:ext>
-            </a:extLst>
-          </p:cNvPr>
-          <p:cNvSpPr>
-            <a:spLocks noGrp="1"/>
-          </p:cNvSpPr>
-          <p:nvPr>
-            <p:ph idx="1"/>
-          </p:nvPr>
-        </p:nvSpPr>
-        <p:spPr/>
-        <p:txBody>
-          <a:bodyPr/>
-          <a:lstStyle/>
-          <a:p>
-            <a:r>
-              <a:rPr lang="fr-FR" dirty="0"/>
-              <a:t>Cybersécurité et confidentialité</a:t>
-            </a:r>
-          </a:p>
-          <a:p>
-            <a:pPr lvl="1"/>
-            <a:r>
-              <a:rPr lang="fr-FR" dirty="0"/>
-              <a:t>sécurisation des données dès la conception</a:t>
-            </a:r>
-          </a:p>
-          <a:p>
-            <a:r>
-              <a:rPr lang="fr-FR" dirty="0"/>
-              <a:t>Interopérabilité</a:t>
-            </a:r>
-          </a:p>
-          <a:p>
-            <a:pPr lvl="1"/>
-            <a:r>
-              <a:rPr lang="fr-FR" dirty="0"/>
-              <a:t>nécessité de standards pour intégrer différents systèmes</a:t>
-            </a:r>
-          </a:p>
-          <a:p>
-            <a:r>
-              <a:rPr lang="fr-FR" dirty="0"/>
-              <a:t>Investissements initiaux élevés</a:t>
-            </a:r>
-          </a:p>
-          <a:p>
-            <a:pPr lvl="1"/>
-            <a:r>
-              <a:rPr lang="fr-FR" dirty="0"/>
-              <a:t>coûts d’infrastructure et de formation</a:t>
-            </a:r>
-          </a:p>
-        </p:txBody>
-      </p:sp>
-    </p:spTree>
-    <p:extLst>
-      <p:ext uri="{BB962C8B-B14F-4D97-AF65-F5344CB8AC3E}">
-        <p14:creationId xmlns:p14="http://schemas.microsoft.com/office/powerpoint/2010/main" val="3206084074"/>
-      </p:ext>
-    </p:extLst>
-  </p:cSld>
-  <p:clrMapOvr>
-    <a:masterClrMapping/>
-  </p:clrMapOvr>
-</p:sld>
-</file>
-
-<file path=ppt/slides/slide8.xml><?xml version="1.0" encoding="utf-8"?>
+<file path=ppt/slides/slide5.xml><?xml version="1.0" encoding="utf-8"?>
 <p:sld xmlns:a="http://schemas.openxmlformats.org/drawingml/2006/main" xmlns:r="http://schemas.openxmlformats.org/officeDocument/2006/relationships" xmlns:p="http://schemas.openxmlformats.org/presentationml/2006/main">
   <p:cSld>
     <p:spTree>
@@ -5496,7 +4092,7 @@
           <a:p>
             <a:r>
               <a:rPr lang="fr-FR" dirty="0"/>
-              <a:t>Tendances clés pour 2026</a:t>
+              <a:t>Tendances clés pour 2027</a:t>
             </a:r>
           </a:p>
         </p:txBody>
@@ -5597,7 +4193,7 @@
 </p:sld>
 </file>
 
-<file path=ppt/slides/slide9.xml><?xml version="1.0" encoding="utf-8"?>
+<file path=ppt/slides/slide6.xml><?xml version="1.0" encoding="utf-8"?>
 <p:sld xmlns:a="http://schemas.openxmlformats.org/drawingml/2006/main" xmlns:r="http://schemas.openxmlformats.org/officeDocument/2006/relationships" xmlns:p="http://schemas.openxmlformats.org/presentationml/2006/main">
   <p:cSld>
     <p:spTree>
@@ -5722,6 +4318,275 @@
     <p:extLst>
       <p:ext uri="{BB962C8B-B14F-4D97-AF65-F5344CB8AC3E}">
         <p14:creationId xmlns:p14="http://schemas.microsoft.com/office/powerpoint/2010/main" val="494322407"/>
+      </p:ext>
+    </p:extLst>
+  </p:cSld>
+  <p:clrMapOvr>
+    <a:masterClrMapping/>
+  </p:clrMapOvr>
+</p:sld>
+</file>
+
+<file path=ppt/slides/slide7.xml><?xml version="1.0" encoding="utf-8"?>
+<p:sld xmlns:a="http://schemas.openxmlformats.org/drawingml/2006/main" xmlns:r="http://schemas.openxmlformats.org/officeDocument/2006/relationships" xmlns:p="http://schemas.openxmlformats.org/presentationml/2006/main">
+  <p:cSld>
+    <p:spTree>
+      <p:nvGrpSpPr>
+        <p:cNvPr id="1" name=""/>
+        <p:cNvGrpSpPr/>
+        <p:nvPr/>
+      </p:nvGrpSpPr>
+      <p:grpSpPr>
+        <a:xfrm>
+          <a:off x="0" y="0"/>
+          <a:ext cx="0" cy="0"/>
+          <a:chOff x="0" y="0"/>
+          <a:chExt cx="0" cy="0"/>
+        </a:xfrm>
+      </p:grpSpPr>
+      <p:sp>
+        <p:nvSpPr>
+          <p:cNvPr id="2" name="Titre 1">
+            <a:extLst>
+              <a:ext uri="{FF2B5EF4-FFF2-40B4-BE49-F238E27FC236}">
+                <a16:creationId xmlns:a16="http://schemas.microsoft.com/office/drawing/2014/main" id="{46913075-B6D2-2F0D-2D6F-1F0833213CB7}"/>
+              </a:ext>
+            </a:extLst>
+          </p:cNvPr>
+          <p:cNvSpPr>
+            <a:spLocks noGrp="1"/>
+          </p:cNvSpPr>
+          <p:nvPr>
+            <p:ph type="title"/>
+          </p:nvPr>
+        </p:nvSpPr>
+        <p:spPr/>
+        <p:txBody>
+          <a:bodyPr/>
+          <a:lstStyle/>
+          <a:p>
+            <a:r>
+              <a:rPr lang="fr-FR" dirty="0"/>
+              <a:t>IoT embarqué</a:t>
+            </a:r>
+          </a:p>
+        </p:txBody>
+      </p:sp>
+      <p:sp>
+        <p:nvSpPr>
+          <p:cNvPr id="3" name="Espace réservé du contenu 2">
+            <a:extLst>
+              <a:ext uri="{FF2B5EF4-FFF2-40B4-BE49-F238E27FC236}">
+                <a16:creationId xmlns:a16="http://schemas.microsoft.com/office/drawing/2014/main" id="{DABABBDA-B082-63C9-4BE2-08007043541E}"/>
+              </a:ext>
+            </a:extLst>
+          </p:cNvPr>
+          <p:cNvSpPr>
+            <a:spLocks noGrp="1"/>
+          </p:cNvSpPr>
+          <p:nvPr>
+            <p:ph idx="1"/>
+          </p:nvPr>
+        </p:nvSpPr>
+        <p:spPr/>
+        <p:txBody>
+          <a:bodyPr/>
+          <a:lstStyle/>
+          <a:p>
+            <a:r>
+              <a:rPr lang="fr-FR" dirty="0"/>
+              <a:t>Stations météos éloignés</a:t>
+            </a:r>
+          </a:p>
+          <a:p>
+            <a:r>
+              <a:rPr lang="fr-FR" dirty="0"/>
+              <a:t>Nomadisme</a:t>
+            </a:r>
+          </a:p>
+          <a:p>
+            <a:r>
+              <a:rPr lang="fr-FR" dirty="0"/>
+              <a:t>Spatial</a:t>
+            </a:r>
+          </a:p>
+          <a:p>
+            <a:r>
+              <a:rPr lang="fr-FR" dirty="0"/>
+              <a:t>Drone</a:t>
+            </a:r>
+          </a:p>
+        </p:txBody>
+      </p:sp>
+      <p:pic>
+        <p:nvPicPr>
+          <p:cNvPr id="5" name="Image 4">
+            <a:extLst>
+              <a:ext uri="{FF2B5EF4-FFF2-40B4-BE49-F238E27FC236}">
+                <a16:creationId xmlns:a16="http://schemas.microsoft.com/office/drawing/2014/main" id="{FC2B98DC-C2A9-9F70-C188-8B4E8E8FE8A3}"/>
+              </a:ext>
+            </a:extLst>
+          </p:cNvPr>
+          <p:cNvPicPr>
+            <a:picLocks noChangeAspect="1"/>
+          </p:cNvPicPr>
+          <p:nvPr/>
+        </p:nvPicPr>
+        <p:blipFill>
+          <a:blip r:embed="rId2"/>
+          <a:stretch>
+            <a:fillRect/>
+          </a:stretch>
+        </p:blipFill>
+        <p:spPr>
+          <a:xfrm>
+            <a:off x="4211960" y="3066160"/>
+            <a:ext cx="2457793" cy="1733792"/>
+          </a:xfrm>
+          <a:prstGeom prst="rect">
+            <a:avLst/>
+          </a:prstGeom>
+        </p:spPr>
+      </p:pic>
+    </p:spTree>
+    <p:extLst>
+      <p:ext uri="{BB962C8B-B14F-4D97-AF65-F5344CB8AC3E}">
+        <p14:creationId xmlns:p14="http://schemas.microsoft.com/office/powerpoint/2010/main" val="2372986704"/>
+      </p:ext>
+    </p:extLst>
+  </p:cSld>
+  <p:clrMapOvr>
+    <a:masterClrMapping/>
+  </p:clrMapOvr>
+</p:sld>
+</file>
+
+<file path=ppt/slides/slide8.xml><?xml version="1.0" encoding="utf-8"?>
+<p:sld xmlns:a="http://schemas.openxmlformats.org/drawingml/2006/main" xmlns:r="http://schemas.openxmlformats.org/officeDocument/2006/relationships" xmlns:p="http://schemas.openxmlformats.org/presentationml/2006/main">
+  <p:cSld>
+    <p:spTree>
+      <p:nvGrpSpPr>
+        <p:cNvPr id="1" name=""/>
+        <p:cNvGrpSpPr/>
+        <p:nvPr/>
+      </p:nvGrpSpPr>
+      <p:grpSpPr>
+        <a:xfrm>
+          <a:off x="0" y="0"/>
+          <a:ext cx="0" cy="0"/>
+          <a:chOff x="0" y="0"/>
+          <a:chExt cx="0" cy="0"/>
+        </a:xfrm>
+      </p:grpSpPr>
+      <p:sp>
+        <p:nvSpPr>
+          <p:cNvPr id="2" name="Titre 1">
+            <a:extLst>
+              <a:ext uri="{FF2B5EF4-FFF2-40B4-BE49-F238E27FC236}">
+                <a16:creationId xmlns:a16="http://schemas.microsoft.com/office/drawing/2014/main" id="{6B2469CE-1ECE-BF74-8055-1A8E683FB831}"/>
+              </a:ext>
+            </a:extLst>
+          </p:cNvPr>
+          <p:cNvSpPr>
+            <a:spLocks noGrp="1"/>
+          </p:cNvSpPr>
+          <p:nvPr>
+            <p:ph type="title"/>
+          </p:nvPr>
+        </p:nvSpPr>
+        <p:spPr/>
+        <p:txBody>
+          <a:bodyPr/>
+          <a:lstStyle/>
+          <a:p>
+            <a:r>
+              <a:rPr lang="fr-FR" dirty="0" err="1"/>
+              <a:t>Wearable</a:t>
+            </a:r>
+            <a:endParaRPr lang="fr-FR" dirty="0"/>
+          </a:p>
+        </p:txBody>
+      </p:sp>
+      <p:sp>
+        <p:nvSpPr>
+          <p:cNvPr id="3" name="Espace réservé du contenu 2">
+            <a:extLst>
+              <a:ext uri="{FF2B5EF4-FFF2-40B4-BE49-F238E27FC236}">
+                <a16:creationId xmlns:a16="http://schemas.microsoft.com/office/drawing/2014/main" id="{F8ACE3D0-F156-EFFB-4374-93D7DFDF5D86}"/>
+              </a:ext>
+            </a:extLst>
+          </p:cNvPr>
+          <p:cNvSpPr>
+            <a:spLocks noGrp="1"/>
+          </p:cNvSpPr>
+          <p:nvPr>
+            <p:ph idx="1"/>
+          </p:nvPr>
+        </p:nvSpPr>
+        <p:spPr/>
+        <p:txBody>
+          <a:bodyPr/>
+          <a:lstStyle/>
+          <a:p>
+            <a:r>
+              <a:rPr lang="fr-FR" dirty="0"/>
+              <a:t>Montre</a:t>
+            </a:r>
+          </a:p>
+          <a:p>
+            <a:r>
+              <a:rPr lang="fr-FR" dirty="0"/>
+              <a:t>Bracelets</a:t>
+            </a:r>
+          </a:p>
+          <a:p>
+            <a:r>
+              <a:rPr lang="fr-FR" dirty="0"/>
+              <a:t>Bijoux</a:t>
+            </a:r>
+          </a:p>
+          <a:p>
+            <a:r>
+              <a:rPr lang="fr-FR" dirty="0"/>
+              <a:t>Habits</a:t>
+            </a:r>
+          </a:p>
+        </p:txBody>
+      </p:sp>
+      <p:pic>
+        <p:nvPicPr>
+          <p:cNvPr id="5" name="Image 4">
+            <a:extLst>
+              <a:ext uri="{FF2B5EF4-FFF2-40B4-BE49-F238E27FC236}">
+                <a16:creationId xmlns:a16="http://schemas.microsoft.com/office/drawing/2014/main" id="{B7040651-8CB2-4C85-2BFD-09A782ED0392}"/>
+              </a:ext>
+            </a:extLst>
+          </p:cNvPr>
+          <p:cNvPicPr>
+            <a:picLocks noChangeAspect="1"/>
+          </p:cNvPicPr>
+          <p:nvPr/>
+        </p:nvPicPr>
+        <p:blipFill>
+          <a:blip r:embed="rId2"/>
+          <a:stretch>
+            <a:fillRect/>
+          </a:stretch>
+        </p:blipFill>
+        <p:spPr>
+          <a:xfrm>
+            <a:off x="2580997" y="1428471"/>
+            <a:ext cx="3982006" cy="4001058"/>
+          </a:xfrm>
+          <a:prstGeom prst="rect">
+            <a:avLst/>
+          </a:prstGeom>
+        </p:spPr>
+      </p:pic>
+    </p:spTree>
+    <p:extLst>
+      <p:ext uri="{BB962C8B-B14F-4D97-AF65-F5344CB8AC3E}">
+        <p14:creationId xmlns:p14="http://schemas.microsoft.com/office/powerpoint/2010/main" val="2877955094"/>
       </p:ext>
     </p:extLst>
   </p:cSld>

--- a/ppt/IoTAI02-Challenge&Impact.pptx
+++ b/ppt/IoTAI02-Challenge&Impact.pptx
@@ -5,20 +5,21 @@
     <p:sldMasterId id="2147483653" r:id="rId1"/>
   </p:sldMasterIdLst>
   <p:notesMasterIdLst>
-    <p:notesMasterId r:id="rId10"/>
+    <p:notesMasterId r:id="rId11"/>
   </p:notesMasterIdLst>
   <p:handoutMasterIdLst>
-    <p:handoutMasterId r:id="rId11"/>
+    <p:handoutMasterId r:id="rId12"/>
   </p:handoutMasterIdLst>
   <p:sldIdLst>
     <p:sldId id="264" r:id="rId2"/>
-    <p:sldId id="300" r:id="rId3"/>
-    <p:sldId id="301" r:id="rId4"/>
-    <p:sldId id="304" r:id="rId5"/>
-    <p:sldId id="306" r:id="rId6"/>
-    <p:sldId id="307" r:id="rId7"/>
-    <p:sldId id="308" r:id="rId8"/>
-    <p:sldId id="309" r:id="rId9"/>
+    <p:sldId id="299" r:id="rId3"/>
+    <p:sldId id="300" r:id="rId4"/>
+    <p:sldId id="301" r:id="rId5"/>
+    <p:sldId id="304" r:id="rId6"/>
+    <p:sldId id="306" r:id="rId7"/>
+    <p:sldId id="307" r:id="rId8"/>
+    <p:sldId id="308" r:id="rId9"/>
+    <p:sldId id="309" r:id="rId10"/>
   </p:sldIdLst>
   <p:sldSz cx="9144000" cy="6858000" type="screen4x3"/>
   <p:notesSz cx="6648450" cy="9782175"/>
@@ -3737,6 +3738,119 @@
           <p:cNvPr id="2" name="Titre 1">
             <a:extLst>
               <a:ext uri="{FF2B5EF4-FFF2-40B4-BE49-F238E27FC236}">
+                <a16:creationId xmlns:a16="http://schemas.microsoft.com/office/drawing/2014/main" id="{C42EFDA7-2C06-F1C4-68E6-45D34EDE40CF}"/>
+              </a:ext>
+            </a:extLst>
+          </p:cNvPr>
+          <p:cNvSpPr>
+            <a:spLocks noGrp="1"/>
+          </p:cNvSpPr>
+          <p:nvPr>
+            <p:ph type="title"/>
+          </p:nvPr>
+        </p:nvSpPr>
+        <p:spPr/>
+        <p:txBody>
+          <a:bodyPr/>
+          <a:lstStyle/>
+          <a:p>
+            <a:r>
+              <a:rPr lang="fr-FR" dirty="0" err="1"/>
+              <a:t>Micro-contrôleurs</a:t>
+            </a:r>
+            <a:endParaRPr lang="fr-FR" dirty="0"/>
+          </a:p>
+        </p:txBody>
+      </p:sp>
+      <p:sp>
+        <p:nvSpPr>
+          <p:cNvPr id="3" name="Espace réservé du contenu 2">
+            <a:extLst>
+              <a:ext uri="{FF2B5EF4-FFF2-40B4-BE49-F238E27FC236}">
+                <a16:creationId xmlns:a16="http://schemas.microsoft.com/office/drawing/2014/main" id="{0EFF3AC7-0912-7616-799B-AC3BBB7876FE}"/>
+              </a:ext>
+            </a:extLst>
+          </p:cNvPr>
+          <p:cNvSpPr>
+            <a:spLocks noGrp="1"/>
+          </p:cNvSpPr>
+          <p:nvPr>
+            <p:ph idx="1"/>
+          </p:nvPr>
+        </p:nvSpPr>
+        <p:spPr/>
+        <p:txBody>
+          <a:bodyPr/>
+          <a:lstStyle/>
+          <a:p>
+            <a:r>
+              <a:rPr lang="fr-FR" sz="2000" dirty="0"/>
+              <a:t>Les microcontrôleurs sont généralement de petits appareils informatiques à faible puissance qui sont intégrés dans du matériel qui nécessite des calculs de base</a:t>
+            </a:r>
+          </a:p>
+          <a:p>
+            <a:r>
+              <a:rPr lang="fr-FR" sz="2000" dirty="0"/>
+              <a:t>Le fait d'exécuter le machine </a:t>
+            </a:r>
+            <a:r>
+              <a:rPr lang="fr-FR" sz="2000" dirty="0" err="1"/>
+              <a:t>learning</a:t>
+            </a:r>
+            <a:r>
+              <a:rPr lang="fr-FR" sz="2000" dirty="0"/>
+              <a:t> sur de très petits microcontrôleurs nous permet d'augmenter l'intelligence de milliards d'appareils utilisés au quotidien, comme des appareils électroménagers et des appareils IoT, sans être tributaires de matériel Internet onéreux ou de la fiabilité des connexions, deux facteurs qui sont souvent soumis à des contraintes de bande passante et de puissance, et qui entraînent une latence élevée</a:t>
+            </a:r>
+          </a:p>
+          <a:p>
+            <a:r>
+              <a:rPr lang="fr-FR" sz="2000" dirty="0"/>
+              <a:t>Cela contribue également à protéger la vie privée, dans la mesure où toutes les données restent sur l'appareil</a:t>
+            </a:r>
+          </a:p>
+          <a:p>
+            <a:r>
+              <a:rPr lang="fr-FR" sz="2000" dirty="0"/>
+              <a:t>Imaginez des appareils électroménagers connectés capables de s'adapter à vos habitudes quotidiennes, des capteurs industriels intelligents capables de faire la différence entre un problème et un fonctionnement normal, ou encore des jouets magiques qui aident les enfants à apprendre tout en s'amusant.</a:t>
+            </a:r>
+          </a:p>
+        </p:txBody>
+      </p:sp>
+    </p:spTree>
+    <p:extLst>
+      <p:ext uri="{BB962C8B-B14F-4D97-AF65-F5344CB8AC3E}">
+        <p14:creationId xmlns:p14="http://schemas.microsoft.com/office/powerpoint/2010/main" val="2856701139"/>
+      </p:ext>
+    </p:extLst>
+  </p:cSld>
+  <p:clrMapOvr>
+    <a:masterClrMapping/>
+  </p:clrMapOvr>
+</p:sld>
+</file>
+
+<file path=ppt/slides/slide3.xml><?xml version="1.0" encoding="utf-8"?>
+<p:sld xmlns:a="http://schemas.openxmlformats.org/drawingml/2006/main" xmlns:r="http://schemas.openxmlformats.org/officeDocument/2006/relationships" xmlns:p="http://schemas.openxmlformats.org/presentationml/2006/main">
+  <p:cSld>
+    <p:spTree>
+      <p:nvGrpSpPr>
+        <p:cNvPr id="1" name=""/>
+        <p:cNvGrpSpPr/>
+        <p:nvPr/>
+      </p:nvGrpSpPr>
+      <p:grpSpPr>
+        <a:xfrm>
+          <a:off x="0" y="0"/>
+          <a:ext cx="0" cy="0"/>
+          <a:chOff x="0" y="0"/>
+          <a:chExt cx="0" cy="0"/>
+        </a:xfrm>
+      </p:grpSpPr>
+      <p:sp>
+        <p:nvSpPr>
+          <p:cNvPr id="2" name="Titre 1">
+            <a:extLst>
+              <a:ext uri="{FF2B5EF4-FFF2-40B4-BE49-F238E27FC236}">
                 <a16:creationId xmlns:a16="http://schemas.microsoft.com/office/drawing/2014/main" id="{A7F6230C-D225-47ED-751A-19233568245E}"/>
               </a:ext>
             </a:extLst>
@@ -3807,7 +3921,7 @@
 </p:sld>
 </file>
 
-<file path=ppt/slides/slide3.xml><?xml version="1.0" encoding="utf-8"?>
+<file path=ppt/slides/slide4.xml><?xml version="1.0" encoding="utf-8"?>
 <p:sld xmlns:a="http://schemas.openxmlformats.org/drawingml/2006/main" xmlns:r="http://schemas.openxmlformats.org/officeDocument/2006/relationships" xmlns:p="http://schemas.openxmlformats.org/presentationml/2006/main">
   <p:cSld>
     <p:spTree>
@@ -3920,7 +4034,7 @@
 </p:sld>
 </file>
 
-<file path=ppt/slides/slide4.xml><?xml version="1.0" encoding="utf-8"?>
+<file path=ppt/slides/slide5.xml><?xml version="1.0" encoding="utf-8"?>
 <p:sld xmlns:a="http://schemas.openxmlformats.org/drawingml/2006/main" xmlns:r="http://schemas.openxmlformats.org/officeDocument/2006/relationships" xmlns:p="http://schemas.openxmlformats.org/presentationml/2006/main">
   <p:cSld>
     <p:spTree>
@@ -4052,7 +4166,7 @@
 </p:sld>
 </file>
 
-<file path=ppt/slides/slide5.xml><?xml version="1.0" encoding="utf-8"?>
+<file path=ppt/slides/slide6.xml><?xml version="1.0" encoding="utf-8"?>
 <p:sld xmlns:a="http://schemas.openxmlformats.org/drawingml/2006/main" xmlns:r="http://schemas.openxmlformats.org/officeDocument/2006/relationships" xmlns:p="http://schemas.openxmlformats.org/presentationml/2006/main">
   <p:cSld>
     <p:spTree>
@@ -4193,7 +4307,7 @@
 </p:sld>
 </file>
 
-<file path=ppt/slides/slide6.xml><?xml version="1.0" encoding="utf-8"?>
+<file path=ppt/slides/slide7.xml><?xml version="1.0" encoding="utf-8"?>
 <p:sld xmlns:a="http://schemas.openxmlformats.org/drawingml/2006/main" xmlns:r="http://schemas.openxmlformats.org/officeDocument/2006/relationships" xmlns:p="http://schemas.openxmlformats.org/presentationml/2006/main">
   <p:cSld>
     <p:spTree>
@@ -4327,7 +4441,7 @@
 </p:sld>
 </file>
 
-<file path=ppt/slides/slide7.xml><?xml version="1.0" encoding="utf-8"?>
+<file path=ppt/slides/slide8.xml><?xml version="1.0" encoding="utf-8"?>
 <p:sld xmlns:a="http://schemas.openxmlformats.org/drawingml/2006/main" xmlns:r="http://schemas.openxmlformats.org/officeDocument/2006/relationships" xmlns:p="http://schemas.openxmlformats.org/presentationml/2006/main">
   <p:cSld>
     <p:spTree>
@@ -4461,7 +4575,7 @@
 </p:sld>
 </file>
 
-<file path=ppt/slides/slide8.xml><?xml version="1.0" encoding="utf-8"?>
+<file path=ppt/slides/slide9.xml><?xml version="1.0" encoding="utf-8"?>
 <p:sld xmlns:a="http://schemas.openxmlformats.org/drawingml/2006/main" xmlns:r="http://schemas.openxmlformats.org/officeDocument/2006/relationships" xmlns:p="http://schemas.openxmlformats.org/presentationml/2006/main">
   <p:cSld>
     <p:spTree>
